--- a/dataset/guides_final/ACS/guide/IT-ACS-002_개발·검증 서버 접근권한 가이드.pptx
+++ b/dataset/guides_final/ACS/guide/IT-ACS-002_개발·검증 서버 접근권한 가이드.pptx
@@ -3239,7 +3239,7 @@
                 <a:ea typeface="Malgun Gothic"/>
                 <a:cs typeface="Malgun Gothic"/>
               </a:rPr>
-              <a:t>한화시스템 ICT 임직원 IT 안내 · 접근권한</a:t>
+              <a:t>가상 ICT 기업 임직원 IT 안내 · 접근권한</a:t>
             </a:r>
           </a:p>
         </p:txBody>
@@ -3471,7 +3471,7 @@
                 <a:ea typeface="Malgun Gothic"/>
                 <a:cs typeface="Malgun Gothic"/>
               </a:rPr>
-              <a:t>© HANWHA SYSTEMS ICT · IT-ACS-002 · 사내 일반</a:t>
+              <a:t>© 가상 ICT 기업 · IT-ACS-002 · 사내 일반</a:t>
             </a:r>
           </a:p>
         </p:txBody>
@@ -5003,7 +5003,7 @@
                 <a:ea typeface="Malgun Gothic"/>
                 <a:cs typeface="Malgun Gothic"/>
               </a:rPr>
-              <a:t>© HANWHA SYSTEMS ICT · IT-ACS-002 · 사내 일반</a:t>
+              <a:t>© 가상 ICT 기업 · IT-ACS-002 · 사내 일반</a:t>
             </a:r>
           </a:p>
         </p:txBody>
@@ -7042,7 +7042,7 @@
                 <a:ea typeface="Malgun Gothic"/>
                 <a:cs typeface="Malgun Gothic"/>
               </a:rPr>
-              <a:t>© HANWHA SYSTEMS ICT · IT-ACS-002 · 사내 일반</a:t>
+              <a:t>© 가상 ICT 기업 · IT-ACS-002 · 사내 일반</a:t>
             </a:r>
           </a:p>
         </p:txBody>
@@ -8550,7 +8550,7 @@
                 <a:ea typeface="Malgun Gothic"/>
                 <a:cs typeface="Malgun Gothic"/>
               </a:rPr>
-              <a:t>© HANWHA SYSTEMS ICT · IT-ACS-002 · 사내 일반</a:t>
+              <a:t>© 가상 ICT 기업 · IT-ACS-002 · 사내 일반</a:t>
             </a:r>
           </a:p>
         </p:txBody>
@@ -9815,7 +9815,7 @@
                 <a:ea typeface="Malgun Gothic"/>
                 <a:cs typeface="Malgun Gothic"/>
               </a:rPr>
-              <a:t>© HANWHA SYSTEMS ICT · IT-ACS-002 · 사내 일반</a:t>
+              <a:t>© 가상 ICT 기업 · IT-ACS-002 · 사내 일반</a:t>
             </a:r>
           </a:p>
         </p:txBody>
@@ -12096,7 +12096,7 @@
                 <a:ea typeface="Malgun Gothic"/>
                 <a:cs typeface="Malgun Gothic"/>
               </a:rPr>
-              <a:t>© HANWHA SYSTEMS ICT · IT-ACS-002 · 사내 일반</a:t>
+              <a:t>© 가상 ICT 기업 · IT-ACS-002 · 사내 일반</a:t>
             </a:r>
           </a:p>
         </p:txBody>
@@ -13630,7 +13630,7 @@
                 <a:ea typeface="Malgun Gothic"/>
                 <a:cs typeface="Malgun Gothic"/>
               </a:rPr>
-              <a:t>© HANWHA SYSTEMS ICT · IT-ACS-002 · 사내 일반</a:t>
+              <a:t>© 가상 ICT 기업 · IT-ACS-002 · 사내 일반</a:t>
             </a:r>
           </a:p>
         </p:txBody>
@@ -14237,7 +14237,7 @@
                 <a:ea typeface="Malgun Gothic"/>
                 <a:cs typeface="Malgun Gothic"/>
               </a:rPr>
-              <a:t>© HANWHA SYSTEMS ICT · IT-ACS-002 · 사내 일반</a:t>
+              <a:t>© 가상 ICT 기업 · IT-ACS-002 · 사내 일반</a:t>
             </a:r>
           </a:p>
         </p:txBody>
@@ -15625,7 +15625,7 @@
                 <a:ea typeface="Malgun Gothic"/>
                 <a:cs typeface="Malgun Gothic"/>
               </a:rPr>
-              <a:t>© HANWHA SYSTEMS ICT · IT-ACS-002 · 사내 일반</a:t>
+              <a:t>© 가상 ICT 기업 · IT-ACS-002 · 사내 일반</a:t>
             </a:r>
           </a:p>
         </p:txBody>
@@ -15873,7 +15873,7 @@
                 <a:ea typeface="Malgun Gothic"/>
                 <a:cs typeface="Malgun Gothic"/>
               </a:rPr>
-              <a:t>© HANWHA SYSTEMS ICT · IT-ACS-002 · 사내 일반</a:t>
+              <a:t>© 가상 ICT 기업 · IT-ACS-002 · 사내 일반</a:t>
             </a:r>
           </a:p>
         </p:txBody>
@@ -16630,7 +16630,7 @@
                 <a:ea typeface="Malgun Gothic"/>
                 <a:cs typeface="Malgun Gothic"/>
               </a:rPr>
-              <a:t>© HANWHA SYSTEMS ICT · IT-ACS-002 · 사내 일반</a:t>
+              <a:t>© 가상 ICT 기업 · IT-ACS-002 · 사내 일반</a:t>
             </a:r>
           </a:p>
         </p:txBody>
@@ -18411,7 +18411,7 @@
                 <a:ea typeface="Malgun Gothic"/>
                 <a:cs typeface="Malgun Gothic"/>
               </a:rPr>
-              <a:t>© HANWHA SYSTEMS ICT · IT-ACS-002 · 사내 일반</a:t>
+              <a:t>© 가상 ICT 기업 · IT-ACS-002 · 사내 일반</a:t>
             </a:r>
           </a:p>
         </p:txBody>
@@ -18659,7 +18659,7 @@
                 <a:ea typeface="Malgun Gothic"/>
                 <a:cs typeface="Malgun Gothic"/>
               </a:rPr>
-              <a:t>© HANWHA SYSTEMS ICT · IT-ACS-002 · 사내 일반</a:t>
+              <a:t>© 가상 ICT 기업 · IT-ACS-002 · 사내 일반</a:t>
             </a:r>
           </a:p>
         </p:txBody>
@@ -19316,7 +19316,7 @@
                 <a:ea typeface="Malgun Gothic"/>
                 <a:cs typeface="Malgun Gothic"/>
               </a:rPr>
-              <a:t>© HANWHA SYSTEMS ICT · IT-ACS-002 · 사내 일반</a:t>
+              <a:t>© 가상 ICT 기업 · IT-ACS-002 · 사내 일반</a:t>
             </a:r>
           </a:p>
         </p:txBody>
@@ -19564,7 +19564,7 @@
                 <a:ea typeface="Malgun Gothic"/>
                 <a:cs typeface="Malgun Gothic"/>
               </a:rPr>
-              <a:t>© HANWHA SYSTEMS ICT · IT-ACS-002 · 사내 일반</a:t>
+              <a:t>© 가상 ICT 기업 · IT-ACS-002 · 사내 일반</a:t>
             </a:r>
           </a:p>
         </p:txBody>
@@ -20076,7 +20076,7 @@
                           <a:ea typeface="Malgun Gothic"/>
                           <a:cs typeface="Malgun Gothic"/>
                         </a:rPr>
-                        <a:t>사내 IT 포털(hanwha-admin) 상단 [챗봇 문의]</a:t>
+                        <a:t>사내 IT 포털 상단 [챗봇 문의]</a:t>
                       </a:r>
                     </a:p>
                   </a:txBody>
@@ -20768,7 +20768,7 @@
                           <a:ea typeface="Malgun Gothic"/>
                           <a:cs typeface="Malgun Gothic"/>
                         </a:rPr>
-                        <a:t>it-helpdesk@hanwha-ict.example</a:t>
+                        <a:t>it-helpdesk@ict.example</a:t>
                       </a:r>
                     </a:p>
                   </a:txBody>
@@ -21067,7 +21067,7 @@
                 <a:ea typeface="Malgun Gothic"/>
                 <a:cs typeface="Malgun Gothic"/>
               </a:rPr>
-              <a:t>© HANWHA SYSTEMS ICT · IT-ACS-002 · 사내 일반</a:t>
+              <a:t>© 가상 ICT 기업 · IT-ACS-002 · 사내 일반</a:t>
             </a:r>
           </a:p>
         </p:txBody>
@@ -21315,7 +21315,7 @@
                 <a:ea typeface="Malgun Gothic"/>
                 <a:cs typeface="Malgun Gothic"/>
               </a:rPr>
-              <a:t>© HANWHA SYSTEMS ICT · IT-ACS-002 · 사내 일반</a:t>
+              <a:t>© 가상 ICT 기업 · IT-ACS-002 · 사내 일반</a:t>
             </a:r>
           </a:p>
         </p:txBody>
@@ -23641,7 +23641,7 @@
                 <a:ea typeface="Malgun Gothic"/>
                 <a:cs typeface="Malgun Gothic"/>
               </a:rPr>
-              <a:t>© HANWHA SYSTEMS ICT · IT-ACS-002 · 사내 일반</a:t>
+              <a:t>© 가상 ICT 기업 · IT-ACS-002 · 사내 일반</a:t>
             </a:r>
           </a:p>
         </p:txBody>
@@ -24618,7 +24618,7 @@
                 <a:ea typeface="Malgun Gothic"/>
                 <a:cs typeface="Malgun Gothic"/>
               </a:rPr>
-              <a:t>© HANWHA SYSTEMS ICT · IT-ACS-002 · 사내 일반</a:t>
+              <a:t>© 가상 ICT 기업 · IT-ACS-002 · 사내 일반</a:t>
             </a:r>
           </a:p>
         </p:txBody>
@@ -25894,7 +25894,7 @@
                 <a:ea typeface="Malgun Gothic"/>
                 <a:cs typeface="Malgun Gothic"/>
               </a:rPr>
-              <a:t>© HANWHA SYSTEMS ICT · IT-ACS-002 · 사내 일반</a:t>
+              <a:t>© 가상 ICT 기업 · IT-ACS-002 · 사내 일반</a:t>
             </a:r>
           </a:p>
         </p:txBody>
@@ -26142,7 +26142,7 @@
                 <a:ea typeface="Malgun Gothic"/>
                 <a:cs typeface="Malgun Gothic"/>
               </a:rPr>
-              <a:t>© HANWHA SYSTEMS ICT · IT-ACS-002 · 사내 일반</a:t>
+              <a:t>© 가상 ICT 기업 · IT-ACS-002 · 사내 일반</a:t>
             </a:r>
           </a:p>
         </p:txBody>
@@ -27578,7 +27578,7 @@
                 <a:ea typeface="Malgun Gothic"/>
                 <a:cs typeface="Malgun Gothic"/>
               </a:rPr>
-              <a:t>© HANWHA SYSTEMS ICT · IT-ACS-002 · 사내 일반</a:t>
+              <a:t>© 가상 ICT 기업 · IT-ACS-002 · 사내 일반</a:t>
             </a:r>
           </a:p>
         </p:txBody>
@@ -27826,7 +27826,7 @@
                 <a:ea typeface="Malgun Gothic"/>
                 <a:cs typeface="Malgun Gothic"/>
               </a:rPr>
-              <a:t>© HANWHA SYSTEMS ICT · IT-ACS-002 · 사내 일반</a:t>
+              <a:t>© 가상 ICT 기업 · IT-ACS-002 · 사내 일반</a:t>
             </a:r>
           </a:p>
         </p:txBody>
@@ -30102,7 +30102,7 @@
                 <a:ea typeface="Malgun Gothic"/>
                 <a:cs typeface="Malgun Gothic"/>
               </a:rPr>
-              <a:t>© HANWHA SYSTEMS ICT · IT-ACS-002 · 사내 일반</a:t>
+              <a:t>© 가상 ICT 기업 · IT-ACS-002 · 사내 일반</a:t>
             </a:r>
           </a:p>
         </p:txBody>
@@ -30350,7 +30350,7 @@
                 <a:ea typeface="Malgun Gothic"/>
                 <a:cs typeface="Malgun Gothic"/>
               </a:rPr>
-              <a:t>© HANWHA SYSTEMS ICT · IT-ACS-002 · 사내 일반</a:t>
+              <a:t>© 가상 ICT 기업 · IT-ACS-002 · 사내 일반</a:t>
             </a:r>
           </a:p>
         </p:txBody>
@@ -32047,7 +32047,7 @@
                 <a:ea typeface="Malgun Gothic"/>
                 <a:cs typeface="Malgun Gothic"/>
               </a:rPr>
-              <a:t>© HANWHA SYSTEMS ICT · IT-ACS-002 · 사내 일반</a:t>
+              <a:t>© 가상 ICT 기업 · IT-ACS-002 · 사내 일반</a:t>
             </a:r>
           </a:p>
         </p:txBody>
